--- a/预推免院校/厦门大学/保研自我介绍.pptx
+++ b/预推免院校/厦门大学/保研自我介绍.pptx
@@ -4970,8 +4970,12 @@
           <a:solidFill>
             <a:srgbClr val="2C478E"/>
           </a:solidFill>
-          <a:ln w="12700" cap="flat" cmpd="sng" algn="ctr">
-            <a:noFill/>
+          <a:ln w="0">
+            <a:solidFill>
+              <a:schemeClr val="bg2">
+                <a:lumMod val="50000"/>
+              </a:schemeClr>
+            </a:solidFill>
             <a:prstDash val="solid"/>
             <a:miter lim="800000"/>
           </a:ln>
@@ -4982,21 +4986,6 @@
               </a:prstClr>
             </a:outerShdw>
           </a:effectLst>
-          <a:extLst>
-            <a:ext uri="{91240B29-F687-4F45-9708-019B960494DF}">
-              <a14:hiddenLine xmlns:a14="http://schemas.microsoft.com/office/drawing/2010/main" w="0">
-                <a:solidFill>
-                  <a:schemeClr val="accent1">
-                    <a:shade val="50000"/>
-                  </a:schemeClr>
-                </a:solidFill>
-                <a:prstDash val="solid"/>
-                <a:miter lim="800000"/>
-                <a:headEnd/>
-                <a:tailEnd/>
-              </a14:hiddenLine>
-            </a:ext>
-          </a:extLst>
         </p:spPr>
         <p:style>
           <a:lnRef idx="2">
@@ -5146,7 +5135,7 @@
                 <a:latin typeface="+mj-ea"/>
                 <a:ea typeface="+mj-ea"/>
               </a:rPr>
-              <a:t> ASC</a:t>
+              <a:t> </a:t>
             </a:r>
             <a:r>
               <a:rPr lang="zh-CN" altLang="en-US" sz="2000" b="1" i="0" dirty="0">
@@ -5157,7 +5146,7 @@
                 <a:latin typeface="+mj-ea"/>
                 <a:ea typeface="+mj-ea"/>
               </a:rPr>
-              <a:t>实验室</a:t>
+              <a:t>信息学院（特色化示范性软件学院）</a:t>
             </a:r>
             <a:r>
               <a:rPr lang="en-US" altLang="zh-CN" sz="2000" b="1" i="0" dirty="0">
@@ -8527,7 +8516,18 @@
                 <a:ea typeface="微软雅黑" panose="020B0503020204020204" pitchFamily="34" charset="-122"/>
                 <a:sym typeface="+mn-ea"/>
               </a:rPr>
-              <a:t>综合发展</a:t>
+              <a:t>竞赛</a:t>
+            </a:r>
+            <a:r>
+              <a:rPr kumimoji="1" lang="zh-CN" altLang="en-US" sz="1600" b="1" spc="110" dirty="0">
+                <a:solidFill>
+                  <a:schemeClr val="bg1"/>
+                </a:solidFill>
+                <a:latin typeface="微软雅黑" panose="020B0503020204020204" pitchFamily="34" charset="-122"/>
+                <a:ea typeface="微软雅黑" panose="020B0503020204020204" pitchFamily="34" charset="-122"/>
+                <a:sym typeface="+mn-ea"/>
+              </a:rPr>
+              <a:t>经历</a:t>
             </a:r>
             <a:endParaRPr kumimoji="1" lang="zh-CN" altLang="en-US" sz="1600" b="1" spc="110" dirty="0">
               <a:solidFill>
@@ -9583,11 +9583,11 @@
             </a:pPr>
             <a:r>
               <a:rPr lang="zh-CN" altLang="en-US"/>
-              <a:t>我感兴趣的方向是探索大模型在各种场景下的应用与落地，</a:t>
+              <a:t>我感兴趣的方向是图像处理、数据挖掘以及机器学习和深度学习在实践中的各种</a:t>
             </a:r>
             <a:r>
               <a:rPr lang="zh-CN" altLang="en-US"/>
-              <a:t>如何利用其强大的认知和生成能力去解决特定领域的实际问题。</a:t>
+              <a:t>应用</a:t>
             </a:r>
             <a:endParaRPr lang="zh-CN" altLang="en-US"/>
           </a:p>
@@ -9858,7 +9858,7 @@
                 <a:latin typeface="+mj-ea"/>
                 <a:ea typeface="+mj-ea"/>
               </a:rPr>
-              <a:t>——   </a:t>
+              <a:t>——  </a:t>
             </a:r>
             <a:r>
               <a:rPr lang="zh-CN" altLang="en-US" sz="2000" b="1" dirty="0">
@@ -9893,7 +9893,7 @@
                 <a:ea typeface="+mj-ea"/>
                 <a:sym typeface="+mn-ea"/>
               </a:rPr>
-              <a:t> ASC</a:t>
+              <a:t> </a:t>
             </a:r>
             <a:r>
               <a:rPr lang="zh-CN" altLang="en-US" sz="2000" b="1" dirty="0">
@@ -9905,7 +9905,7 @@
                 <a:ea typeface="+mj-ea"/>
                 <a:sym typeface="+mn-ea"/>
               </a:rPr>
-              <a:t>实验室</a:t>
+              <a:t>信息学院（特色化示范性软件学院）</a:t>
             </a:r>
             <a:r>
               <a:rPr lang="en-US" altLang="zh-CN" sz="2000" b="1" i="0" dirty="0">
@@ -9916,7 +9916,7 @@
                 <a:latin typeface="+mj-ea"/>
                 <a:ea typeface="+mj-ea"/>
               </a:rPr>
-              <a:t>  ——</a:t>
+              <a:t>——</a:t>
             </a:r>
             <a:endParaRPr lang="en-US" altLang="zh-CN" sz="2000" b="1" i="0" dirty="0">
               <a:solidFill>
@@ -10679,7 +10679,7 @@
                 <a:latin typeface="+mj-ea"/>
                 <a:ea typeface="+mj-ea"/>
               </a:rPr>
-              <a:t>科研经历</a:t>
+              <a:t>项目经历</a:t>
             </a:r>
             <a:endParaRPr lang="zh-CN" altLang="en-US" sz="2800" b="1" spc="200" dirty="0">
               <a:latin typeface="+mj-ea"/>
@@ -10920,7 +10920,7 @@
         </p:nvSpPr>
         <p:spPr>
           <a:xfrm>
-            <a:off x="8411210" y="4509770"/>
+            <a:off x="8502650" y="4509770"/>
             <a:ext cx="3856990" cy="521970"/>
           </a:xfrm>
           <a:prstGeom prst="rect">
@@ -10968,7 +10968,7 @@
         </p:nvSpPr>
         <p:spPr>
           <a:xfrm>
-            <a:off x="9488170" y="3291205"/>
+            <a:off x="9389745" y="3286125"/>
             <a:ext cx="1708785" cy="1014730"/>
           </a:xfrm>
           <a:prstGeom prst="rect">
@@ -11015,8 +11015,8 @@
         </p:nvCxnSpPr>
         <p:spPr>
           <a:xfrm>
-            <a:off x="9442450" y="4399280"/>
-            <a:ext cx="1800225" cy="0"/>
+            <a:off x="9106535" y="4390390"/>
+            <a:ext cx="2660650" cy="12065"/>
           </a:xfrm>
           <a:prstGeom prst="line">
             <a:avLst/>
@@ -11835,18 +11835,7 @@
                 <a:ea typeface="微软雅黑" panose="020B0503020204020204" pitchFamily="34" charset="-122"/>
                 <a:sym typeface="+mn-ea"/>
               </a:rPr>
-              <a:t>科研</a:t>
-            </a:r>
-            <a:r>
-              <a:rPr kumimoji="1" lang="zh-CN" altLang="en-US" sz="1600" b="1" spc="110" dirty="0">
-                <a:solidFill>
-                  <a:schemeClr val="bg1"/>
-                </a:solidFill>
-                <a:latin typeface="微软雅黑" panose="020B0503020204020204" pitchFamily="34" charset="-122"/>
-                <a:ea typeface="微软雅黑" panose="020B0503020204020204" pitchFamily="34" charset="-122"/>
-                <a:sym typeface="+mn-ea"/>
-              </a:rPr>
-              <a:t>经历</a:t>
+              <a:t>项目经历</a:t>
             </a:r>
             <a:endParaRPr kumimoji="1" lang="zh-CN" altLang="en-US" sz="1600" b="1" spc="110" dirty="0">
               <a:solidFill>
@@ -12305,18 +12294,7 @@
                 <a:ea typeface="微软雅黑" panose="020B0503020204020204" pitchFamily="34" charset="-122"/>
                 <a:cs typeface="Arial" panose="020B0604020202020204" pitchFamily="34" charset="0"/>
               </a:rPr>
-              <a:t>外语</a:t>
-            </a:r>
-            <a:r>
-              <a:rPr kumimoji="1" lang="zh-CN" altLang="en-US" sz="2000" b="1" spc="120" dirty="0">
-                <a:solidFill>
-                  <a:srgbClr val="2B468E"/>
-                </a:solidFill>
-                <a:latin typeface="Arial" panose="020B0604020202020204" pitchFamily="34" charset="0"/>
-                <a:ea typeface="微软雅黑" panose="020B0503020204020204" pitchFamily="34" charset="-122"/>
-                <a:cs typeface="Arial" panose="020B0604020202020204" pitchFamily="34" charset="0"/>
-              </a:rPr>
-              <a:t>水平</a:t>
+              <a:t>核心课程</a:t>
             </a:r>
             <a:endParaRPr kumimoji="1" lang="zh-CN" altLang="en-US" sz="2000" b="1" spc="120" dirty="0">
               <a:solidFill>
@@ -12360,7 +12338,7 @@
               <a:buFontTx/>
             </a:pPr>
             <a:r>
-              <a:rPr kumimoji="1" lang="zh-CN" altLang="en-US" sz="1600" spc="120" dirty="0">
+              <a:rPr kumimoji="1" sz="1600" spc="120" dirty="0">
                 <a:solidFill>
                   <a:schemeClr val="tx1">
                     <a:lumMod val="75000"/>
@@ -12372,10 +12350,10 @@
                 <a:ea typeface="微软雅黑" panose="020B0503020204020204" pitchFamily="34" charset="-122"/>
                 <a:sym typeface="+mn-ea"/>
               </a:rPr>
-              <a:t>英语：</a:t>
-            </a:r>
-            <a:r>
-              <a:rPr kumimoji="1" lang="en-US" altLang="zh-CN" sz="1600" spc="120" dirty="0">
+              <a:t>程序设计(94)、数据结构(95)、计算机网络(92)、算法分析与设计(96)</a:t>
+            </a:r>
+            <a:r>
+              <a:rPr kumimoji="1" lang="zh-CN" altLang="en-US" sz="1600" spc="120" dirty="0">
                 <a:solidFill>
                   <a:schemeClr val="tx1">
                     <a:lumMod val="75000"/>
@@ -12387,52 +12365,7 @@
                 <a:ea typeface="微软雅黑" panose="020B0503020204020204" pitchFamily="34" charset="-122"/>
                 <a:sym typeface="+mn-ea"/>
               </a:rPr>
-              <a:t>CET4</a:t>
-            </a:r>
-            <a:r>
-              <a:rPr kumimoji="1" lang="zh-CN" altLang="en-US" sz="1600" spc="120" dirty="0">
-                <a:solidFill>
-                  <a:schemeClr val="tx1">
-                    <a:lumMod val="75000"/>
-                    <a:lumOff val="25000"/>
-                  </a:schemeClr>
-                </a:solidFill>
-                <a:uFillTx/>
-                <a:latin typeface="Arial" panose="020B0604020202020204" pitchFamily="34" charset="0"/>
-                <a:ea typeface="微软雅黑" panose="020B0503020204020204" pitchFamily="34" charset="-122"/>
-                <a:sym typeface="+mn-ea"/>
-              </a:rPr>
-              <a:t>（</a:t>
-            </a:r>
-            <a:r>
-              <a:rPr kumimoji="1" lang="en-US" altLang="zh-CN" sz="1600" spc="120" dirty="0">
-                <a:solidFill>
-                  <a:schemeClr val="tx1">
-                    <a:lumMod val="75000"/>
-                    <a:lumOff val="25000"/>
-                  </a:schemeClr>
-                </a:solidFill>
-                <a:uFillTx/>
-                <a:latin typeface="Arial" panose="020B0604020202020204" pitchFamily="34" charset="0"/>
-                <a:ea typeface="微软雅黑" panose="020B0503020204020204" pitchFamily="34" charset="-122"/>
-                <a:sym typeface="+mn-ea"/>
-              </a:rPr>
-              <a:t>441</a:t>
-            </a:r>
-            <a:r>
-              <a:rPr kumimoji="1" lang="zh-CN" altLang="en-US" sz="1600" spc="120" dirty="0">
-                <a:solidFill>
-                  <a:schemeClr val="tx1">
-                    <a:lumMod val="75000"/>
-                    <a:lumOff val="25000"/>
-                  </a:schemeClr>
-                </a:solidFill>
-                <a:uFillTx/>
-                <a:latin typeface="Arial" panose="020B0604020202020204" pitchFamily="34" charset="0"/>
-                <a:ea typeface="微软雅黑" panose="020B0503020204020204" pitchFamily="34" charset="-122"/>
-                <a:sym typeface="+mn-ea"/>
-              </a:rPr>
-              <a:t>） </a:t>
+              <a:t> </a:t>
             </a:r>
             <a:endParaRPr kumimoji="1" lang="zh-CN" altLang="en-US" sz="1600" spc="120" dirty="0">
               <a:solidFill>
@@ -22636,7 +22569,7 @@
 <file path=ppt/tags/tag10.xml><?xml version="1.0" encoding="utf-8"?>
 <p:tagLst xmlns:p="http://schemas.openxmlformats.org/presentationml/2006/main">
   <p:tag name="KSO_WM_BEAUTIFY_FLAG" val=""/>
-  <p:tag name="KSO_WM_DIAGRAM_VIRTUALLY_FRAME" val="{&quot;height&quot;:204.95,&quot;left&quot;:42.1,&quot;top&quot;:259.1,&quot;width&quot;:923.9}"/>
+  <p:tag name="KSO_WM_DIAGRAM_VIRTUALLY_FRAME" val="{&quot;height&quot;:206.2,&quot;left&quot;:42.1,&quot;top&quot;:257.85,&quot;width&quot;:931.1}"/>
 </p:tagLst>
 </file>
 
@@ -22709,7 +22642,7 @@
 <file path=ppt/tags/tag11.xml><?xml version="1.0" encoding="utf-8"?>
 <p:tagLst xmlns:p="http://schemas.openxmlformats.org/presentationml/2006/main">
   <p:tag name="KSO_WM_BEAUTIFY_FLAG" val=""/>
-  <p:tag name="KSO_WM_DIAGRAM_VIRTUALLY_FRAME" val="{&quot;height&quot;:204.95,&quot;left&quot;:42.1,&quot;top&quot;:259.1,&quot;width&quot;:923.9}"/>
+  <p:tag name="KSO_WM_DIAGRAM_VIRTUALLY_FRAME" val="{&quot;height&quot;:206.2,&quot;left&quot;:42.1,&quot;top&quot;:257.85,&quot;width&quot;:931.1}"/>
 </p:tagLst>
 </file>
 
@@ -22776,7 +22709,7 @@
 <file path=ppt/tags/tag12.xml><?xml version="1.0" encoding="utf-8"?>
 <p:tagLst xmlns:p="http://schemas.openxmlformats.org/presentationml/2006/main">
   <p:tag name="KSO_WM_BEAUTIFY_FLAG" val=""/>
-  <p:tag name="KSO_WM_DIAGRAM_VIRTUALLY_FRAME" val="{&quot;height&quot;:204.95,&quot;left&quot;:42.1,&quot;top&quot;:259.1,&quot;width&quot;:923.9}"/>
+  <p:tag name="KSO_WM_DIAGRAM_VIRTUALLY_FRAME" val="{&quot;height&quot;:206.2,&quot;left&quot;:42.1,&quot;top&quot;:257.85,&quot;width&quot;:931.1}"/>
 </p:tagLst>
 </file>
 
@@ -22795,13 +22728,14 @@
 <file path=ppt/tags/tag122.xml><?xml version="1.0" encoding="utf-8"?>
 <p:tagLst xmlns:p="http://schemas.openxmlformats.org/presentationml/2006/main">
   <p:tag name="ISLIDE.GUIDESSETTING" val="{&quot;Id&quot;:null,&quot;Name&quot;:&quot;适中&quot;,&quot;HeaderHeight&quot;:10.0,&quot;FooterHeight&quot;:5.0,&quot;SideMargin&quot;:5.0,&quot;TopMargin&quot;:0.0,&quot;BottomMargin&quot;:0.0,&quot;IntervalMargin&quot;:1.5,&quot;SettingType&quot;:&quot;System&quot;}"/>
+  <p:tag name="commondata" val="eyJoZGlkIjoiMDkxZTNkYTE4MzcwZjBiNTE3ZTU5YTYxZWM3NjgzODMifQ=="/>
 </p:tagLst>
 </file>
 
 <file path=ppt/tags/tag13.xml><?xml version="1.0" encoding="utf-8"?>
 <p:tagLst xmlns:p="http://schemas.openxmlformats.org/presentationml/2006/main">
   <p:tag name="KSO_WM_BEAUTIFY_FLAG" val=""/>
-  <p:tag name="KSO_WM_DIAGRAM_VIRTUALLY_FRAME" val="{&quot;height&quot;:204.95,&quot;left&quot;:42.1,&quot;top&quot;:259.1,&quot;width&quot;:923.9}"/>
+  <p:tag name="KSO_WM_DIAGRAM_VIRTUALLY_FRAME" val="{&quot;height&quot;:206.2,&quot;left&quot;:42.1,&quot;top&quot;:257.85,&quot;width&quot;:931.1}"/>
 </p:tagLst>
 </file>
 
@@ -22843,7 +22777,7 @@
 
 <file path=ppt/tags/tag2.xml><?xml version="1.0" encoding="utf-8"?>
 <p:tagLst xmlns:p="http://schemas.openxmlformats.org/presentationml/2006/main">
-  <p:tag name="KSO_WM_DIAGRAM_VIRTUALLY_FRAME" val="{&quot;height&quot;:204.95,&quot;left&quot;:42.1,&quot;top&quot;:259.1,&quot;width&quot;:923.9}"/>
+  <p:tag name="KSO_WM_DIAGRAM_VIRTUALLY_FRAME" val="{&quot;height&quot;:206.2,&quot;left&quot;:42.1,&quot;top&quot;:257.85,&quot;width&quot;:931.1}"/>
 </p:tagLst>
 </file>
 
@@ -22909,7 +22843,7 @@
 
 <file path=ppt/tags/tag3.xml><?xml version="1.0" encoding="utf-8"?>
 <p:tagLst xmlns:p="http://schemas.openxmlformats.org/presentationml/2006/main">
-  <p:tag name="KSO_WM_DIAGRAM_VIRTUALLY_FRAME" val="{&quot;height&quot;:204.95,&quot;left&quot;:42.1,&quot;top&quot;:259.1,&quot;width&quot;:923.9}"/>
+  <p:tag name="KSO_WM_DIAGRAM_VIRTUALLY_FRAME" val="{&quot;height&quot;:206.2,&quot;left&quot;:42.1,&quot;top&quot;:257.85,&quot;width&quot;:931.1}"/>
 </p:tagLst>
 </file>
 
@@ -22976,7 +22910,7 @@
 <file path=ppt/tags/tag4.xml><?xml version="1.0" encoding="utf-8"?>
 <p:tagLst xmlns:p="http://schemas.openxmlformats.org/presentationml/2006/main">
   <p:tag name="KSO_WM_BEAUTIFY_FLAG" val=""/>
-  <p:tag name="KSO_WM_DIAGRAM_VIRTUALLY_FRAME" val="{&quot;height&quot;:204.95,&quot;left&quot;:42.1,&quot;top&quot;:259.1,&quot;width&quot;:923.9}"/>
+  <p:tag name="KSO_WM_DIAGRAM_VIRTUALLY_FRAME" val="{&quot;height&quot;:206.2,&quot;left&quot;:42.1,&quot;top&quot;:257.85,&quot;width&quot;:931.1}"/>
 </p:tagLst>
 </file>
 
@@ -23048,7 +22982,7 @@
 <file path=ppt/tags/tag5.xml><?xml version="1.0" encoding="utf-8"?>
 <p:tagLst xmlns:p="http://schemas.openxmlformats.org/presentationml/2006/main">
   <p:tag name="KSO_WM_BEAUTIFY_FLAG" val=""/>
-  <p:tag name="KSO_WM_DIAGRAM_VIRTUALLY_FRAME" val="{&quot;height&quot;:204.95,&quot;left&quot;:42.1,&quot;top&quot;:259.1,&quot;width&quot;:923.9}"/>
+  <p:tag name="KSO_WM_DIAGRAM_VIRTUALLY_FRAME" val="{&quot;height&quot;:206.2,&quot;left&quot;:42.1,&quot;top&quot;:257.85,&quot;width&quot;:931.1}"/>
 </p:tagLst>
 </file>
 
@@ -23122,7 +23056,7 @@
 <file path=ppt/tags/tag6.xml><?xml version="1.0" encoding="utf-8"?>
 <p:tagLst xmlns:p="http://schemas.openxmlformats.org/presentationml/2006/main">
   <p:tag name="KSO_WM_BEAUTIFY_FLAG" val=""/>
-  <p:tag name="KSO_WM_DIAGRAM_VIRTUALLY_FRAME" val="{&quot;height&quot;:204.95,&quot;left&quot;:42.1,&quot;top&quot;:259.1,&quot;width&quot;:923.9}"/>
+  <p:tag name="KSO_WM_DIAGRAM_VIRTUALLY_FRAME" val="{&quot;height&quot;:206.2,&quot;left&quot;:42.1,&quot;top&quot;:257.85,&quot;width&quot;:931.1}"/>
 </p:tagLst>
 </file>
 
@@ -23189,7 +23123,7 @@
 <file path=ppt/tags/tag7.xml><?xml version="1.0" encoding="utf-8"?>
 <p:tagLst xmlns:p="http://schemas.openxmlformats.org/presentationml/2006/main">
   <p:tag name="KSO_WM_BEAUTIFY_FLAG" val=""/>
-  <p:tag name="KSO_WM_DIAGRAM_VIRTUALLY_FRAME" val="{&quot;height&quot;:204.95,&quot;left&quot;:42.1,&quot;top&quot;:259.1,&quot;width&quot;:923.9}"/>
+  <p:tag name="KSO_WM_DIAGRAM_VIRTUALLY_FRAME" val="{&quot;height&quot;:206.2,&quot;left&quot;:42.1,&quot;top&quot;:257.85,&quot;width&quot;:931.1}"/>
 </p:tagLst>
 </file>
 
@@ -23264,7 +23198,7 @@
 <file path=ppt/tags/tag8.xml><?xml version="1.0" encoding="utf-8"?>
 <p:tagLst xmlns:p="http://schemas.openxmlformats.org/presentationml/2006/main">
   <p:tag name="KSO_WM_BEAUTIFY_FLAG" val=""/>
-  <p:tag name="KSO_WM_DIAGRAM_VIRTUALLY_FRAME" val="{&quot;height&quot;:204.95,&quot;left&quot;:42.1,&quot;top&quot;:259.1,&quot;width&quot;:923.9}"/>
+  <p:tag name="KSO_WM_DIAGRAM_VIRTUALLY_FRAME" val="{&quot;height&quot;:206.2,&quot;left&quot;:42.1,&quot;top&quot;:257.85,&quot;width&quot;:931.1}"/>
 </p:tagLst>
 </file>
 
@@ -23331,7 +23265,7 @@
 <file path=ppt/tags/tag9.xml><?xml version="1.0" encoding="utf-8"?>
 <p:tagLst xmlns:p="http://schemas.openxmlformats.org/presentationml/2006/main">
   <p:tag name="KSO_WM_BEAUTIFY_FLAG" val=""/>
-  <p:tag name="KSO_WM_DIAGRAM_VIRTUALLY_FRAME" val="{&quot;height&quot;:204.95,&quot;left&quot;:42.1,&quot;top&quot;:259.1,&quot;width&quot;:923.9}"/>
+  <p:tag name="KSO_WM_DIAGRAM_VIRTUALLY_FRAME" val="{&quot;height&quot;:206.2,&quot;left&quot;:42.1,&quot;top&quot;:257.85,&quot;width&quot;:931.1}"/>
 </p:tagLst>
 </file>
 
